--- a/templates/deck/house-dark.pptx
+++ b/templates/deck/house-dark.pptx
@@ -4,7 +4,6 @@
   <p:sldMasterIdLst>
     <p:sldMasterId id="2147483648" r:id="rId1"/>
   </p:sldMasterIdLst>
-  <p:sldIdLst/>
   <p:sldSz cx="12192000" cy="6858000" type="screen4x3"/>
   <p:notesSz cx="6858000" cy="9144000"/>
   <p:defaultTextStyle>
@@ -250,6 +249,489 @@
 </p:sldLayout>
 </file>
 
+<file path=ppt/slideLayouts/slideLayout10.xml><?xml version="1.0" encoding="utf-8"?>
+<p:sldLayout xmlns:a="http://schemas.openxmlformats.org/drawingml/2006/main" xmlns:r="http://schemas.openxmlformats.org/officeDocument/2006/relationships" xmlns:p="http://schemas.openxmlformats.org/presentationml/2006/main" preserve="1">
+  <p:cSld name="Image + Text">
+    <p:spTree>
+      <p:nvGrpSpPr>
+        <p:cNvPr id="1" name=""/>
+        <p:cNvGrpSpPr/>
+        <p:nvPr/>
+      </p:nvGrpSpPr>
+      <p:grpSpPr>
+        <a:xfrm>
+          <a:off x="0" y="0"/>
+          <a:ext cx="0" cy="0"/>
+          <a:chOff x="0" y="0"/>
+          <a:chExt cx="0" cy="0"/>
+        </a:xfrm>
+      </p:grpSpPr>
+      <p:pic>
+        <p:nvPicPr>
+          <p:cNvPr id="53" name="Decor molecule-corner" descr="">
+            <a:extLst>
+              <a:ext uri="{C183D7F6-B498-43B3-948B-1728B52AA6E4}">
+                <adec:decorative xmlns:adec="http://schemas.microsoft.com/office/drawing/2017/decorative" val="1"/>
+              </a:ext>
+            </a:extLst>
+          </p:cNvPr>
+          <p:cNvPicPr>
+            <a:picLocks noChangeAspect="1"/>
+          </p:cNvPicPr>
+          <p:nvPr/>
+        </p:nvPicPr>
+        <p:blipFill>
+          <a:blip r:embed="rId2">
+            <a:extLst>
+              <a:ext uri="{96DAC541-7B7A-43D3-8B79-37D633B846F1}">
+                <asvg:svgBlip xmlns:asvg="http://schemas.microsoft.com/office/drawing/2016/SVG/main" r:embed="rId3"/>
+              </a:ext>
+            </a:extLst>
+          </a:blip>
+          <a:stretch>
+            <a:fillRect/>
+          </a:stretch>
+        </p:blipFill>
+        <p:spPr>
+          <a:xfrm>
+            <a:off x="9906000" y="266700"/>
+            <a:ext cx="1714500" cy="857250"/>
+          </a:xfrm>
+          <a:prstGeom prst="rect">
+            <a:avLst/>
+          </a:prstGeom>
+        </p:spPr>
+      </p:pic>
+      <p:sp>
+        <p:nvSpPr>
+          <p:cNvPr id="2" name="Title 1"/>
+          <p:cNvSpPr>
+            <a:spLocks noGrp="1"/>
+          </p:cNvSpPr>
+          <p:nvPr>
+            <p:ph type="title"/>
+          </p:nvPr>
+        </p:nvSpPr>
+        <p:spPr>
+          <a:xfrm>
+            <a:off x="609600" y="342900"/>
+            <a:ext cx="9144000" cy="800100"/>
+          </a:xfrm>
+        </p:spPr>
+        <p:txBody>
+          <a:bodyPr anchor="b">
+            <a:normAutofit/>
+          </a:bodyPr>
+          <a:lstStyle/>
+          <a:p>
+            <a:r>
+              <a:rPr lang="en-US"/>
+              <a:t>Slide title</a:t>
+            </a:r>
+            <a:endParaRPr lang="en-US"/>
+          </a:p>
+        </p:txBody>
+      </p:sp>
+      <p:sp>
+        <p:nvSpPr>
+          <p:cNvPr id="3" name="Figure 2"/>
+          <p:cNvSpPr>
+            <a:spLocks noGrp="1"/>
+          </p:cNvSpPr>
+          <p:nvPr>
+            <p:ph type="pic" sz="quarter" idx="13"/>
+          </p:nvPr>
+        </p:nvSpPr>
+        <p:spPr>
+          <a:xfrm>
+            <a:off x="609600" y="1333500"/>
+            <a:ext cx="5715000" cy="4572000"/>
+          </a:xfrm>
+        </p:spPr>
+        <p:txBody>
+          <a:bodyPr anchor="ctr">
+            <a:normAutofit/>
+          </a:bodyPr>
+          <a:lstStyle/>
+          <a:p>
+            <a:r>
+              <a:rPr lang="en-US"/>
+              <a:t>Figure</a:t>
+            </a:r>
+            <a:endParaRPr lang="en-US"/>
+          </a:p>
+        </p:txBody>
+      </p:sp>
+      <p:sp>
+        <p:nvSpPr>
+          <p:cNvPr id="4" name="Text 3"/>
+          <p:cNvSpPr>
+            <a:spLocks noGrp="1"/>
+          </p:cNvSpPr>
+          <p:nvPr>
+            <p:ph type="body" idx="14"/>
+          </p:nvPr>
+        </p:nvSpPr>
+        <p:spPr>
+          <a:xfrm>
+            <a:off x="6781800" y="1428750"/>
+            <a:ext cx="4800600" cy="4476750"/>
+          </a:xfrm>
+        </p:spPr>
+        <p:txBody>
+          <a:bodyPr anchor="ctr">
+            <a:normAutofit/>
+          </a:bodyPr>
+          <a:lstStyle>
+            <a:lvl1pPr marL="285750" indent="-285750" algn="l">
+              <a:lnSpc>
+                <a:spcPct val="100000"/>
+              </a:lnSpc>
+              <a:spcBef>
+                <a:spcPts val="1000"/>
+              </a:spcBef>
+              <a:buClr>
+                <a:schemeClr val="accent1"/>
+              </a:buClr>
+              <a:buFont typeface="Arial"/>
+              <a:buChar char="•"/>
+              <a:defRPr sz="2000">
+                <a:solidFill>
+                  <a:schemeClr val="tx1"/>
+                </a:solidFill>
+                <a:latin typeface="+mn-lt"/>
+                <a:ea typeface="+mn-ea"/>
+                <a:cs typeface="+mn-cs"/>
+              </a:defRPr>
+            </a:lvl1pPr>
+          </a:lstStyle>
+          <a:p>
+            <a:r>
+              <a:rPr lang="en-US"/>
+              <a:t>Text</a:t>
+            </a:r>
+            <a:endParaRPr lang="en-US"/>
+          </a:p>
+        </p:txBody>
+      </p:sp>
+      <p:sp>
+        <p:nvSpPr>
+          <p:cNvPr id="50" name="Date Placeholder"/>
+          <p:cNvSpPr>
+            <a:spLocks noGrp="1"/>
+          </p:cNvSpPr>
+          <p:nvPr>
+            <p:ph type="dt" sz="half" idx="10"/>
+          </p:nvPr>
+        </p:nvSpPr>
+        <p:spPr>
+          <a:xfrm>
+            <a:off x="7239000" y="6515100"/>
+            <a:ext cx="3048000" cy="228600"/>
+          </a:xfrm>
+        </p:spPr>
+        <p:txBody>
+          <a:bodyPr anchor="ctr" lIns="0" tIns="0" rIns="0" bIns="0">
+            <a:normAutofit/>
+          </a:bodyPr>
+          <a:lstStyle>
+            <a:lvl1pPr marL="0" indent="0" algn="r">
+              <a:buNone/>
+              <a:defRPr sz="1000">
+                <a:solidFill>
+                  <a:schemeClr val="tx2"/>
+                </a:solidFill>
+                <a:latin typeface="+mn-lt"/>
+                <a:ea typeface="+mn-ea"/>
+                <a:cs typeface="+mn-cs"/>
+              </a:defRPr>
+            </a:lvl1pPr>
+          </a:lstStyle>
+          <a:p>
+            <a:r>
+              <a:rPr lang="en-US"/>
+              <a:t>Date</a:t>
+            </a:r>
+            <a:endParaRPr lang="en-US"/>
+          </a:p>
+        </p:txBody>
+      </p:sp>
+      <p:sp>
+        <p:nvSpPr>
+          <p:cNvPr id="51" name="Footer Placeholder"/>
+          <p:cNvSpPr>
+            <a:spLocks noGrp="1"/>
+          </p:cNvSpPr>
+          <p:nvPr>
+            <p:ph type="ftr" sz="quarter" idx="11"/>
+          </p:nvPr>
+        </p:nvSpPr>
+        <p:spPr>
+          <a:xfrm>
+            <a:off x="609600" y="6515100"/>
+            <a:ext cx="6096000" cy="228600"/>
+          </a:xfrm>
+        </p:spPr>
+        <p:txBody>
+          <a:bodyPr anchor="ctr" lIns="0" tIns="0" rIns="0" bIns="0">
+            <a:normAutofit/>
+          </a:bodyPr>
+          <a:lstStyle>
+            <a:lvl1pPr marL="0" indent="0" algn="l">
+              <a:buNone/>
+              <a:defRPr sz="1000">
+                <a:solidFill>
+                  <a:schemeClr val="tx2"/>
+                </a:solidFill>
+                <a:latin typeface="+mn-lt"/>
+                <a:ea typeface="+mn-ea"/>
+                <a:cs typeface="+mn-cs"/>
+              </a:defRPr>
+            </a:lvl1pPr>
+          </a:lstStyle>
+          <a:p>
+            <a:r>
+              <a:rPr lang="en-US"/>
+              <a:t>Footer</a:t>
+            </a:r>
+            <a:endParaRPr lang="en-US"/>
+          </a:p>
+        </p:txBody>
+      </p:sp>
+      <p:sp>
+        <p:nvSpPr>
+          <p:cNvPr id="52" name="Slide Number Placeholder"/>
+          <p:cNvSpPr>
+            <a:spLocks noGrp="1"/>
+          </p:cNvSpPr>
+          <p:nvPr>
+            <p:ph type="sldNum" sz="quarter" idx="12"/>
+          </p:nvPr>
+        </p:nvSpPr>
+        <p:spPr>
+          <a:xfrm>
+            <a:off x="10477500" y="6515100"/>
+            <a:ext cx="1104900" cy="228600"/>
+          </a:xfrm>
+        </p:spPr>
+        <p:txBody>
+          <a:bodyPr anchor="ctr" lIns="0" tIns="0" rIns="0" bIns="0">
+            <a:normAutofit/>
+          </a:bodyPr>
+          <a:lstStyle>
+            <a:lvl1pPr marL="0" indent="0" algn="r">
+              <a:buNone/>
+              <a:defRPr sz="1000" b="1">
+                <a:solidFill>
+                  <a:schemeClr val="tx2"/>
+                </a:solidFill>
+                <a:latin typeface="+mn-lt"/>
+                <a:ea typeface="+mn-ea"/>
+                <a:cs typeface="+mn-cs"/>
+              </a:defRPr>
+            </a:lvl1pPr>
+          </a:lstStyle>
+          <a:p>
+            <a:fld id="{B6F15528-21DE-4FAA-801E-634DDDAF4B2B}" type="slidenum">
+              <a:rPr lang="en-US"/>
+              <a:t>‹#›</a:t>
+            </a:fld>
+            <a:endParaRPr lang="en-US"/>
+          </a:p>
+        </p:txBody>
+      </p:sp>
+    </p:spTree>
+  </p:cSld>
+  <p:clrMapOvr>
+    <a:masterClrMapping/>
+  </p:clrMapOvr>
+</p:sldLayout>
+</file>
+
+<file path=ppt/slideLayouts/slideLayout11.xml><?xml version="1.0" encoding="utf-8"?>
+<p:sldLayout xmlns:a="http://schemas.openxmlformats.org/drawingml/2006/main" xmlns:r="http://schemas.openxmlformats.org/officeDocument/2006/relationships" xmlns:p="http://schemas.openxmlformats.org/presentationml/2006/main" showMasterSp="0" preserve="1">
+  <p:cSld name="Closing">
+    <p:spTree>
+      <p:nvGrpSpPr>
+        <p:cNvPr id="1" name=""/>
+        <p:cNvGrpSpPr/>
+        <p:nvPr/>
+      </p:nvGrpSpPr>
+      <p:grpSpPr>
+        <a:xfrm>
+          <a:off x="0" y="0"/>
+          <a:ext cx="0" cy="0"/>
+          <a:chOff x="0" y="0"/>
+          <a:chExt cx="0" cy="0"/>
+        </a:xfrm>
+      </p:grpSpPr>
+      <p:pic>
+        <p:nvPicPr>
+          <p:cNvPr id="5" name="Decor closing-orbit" descr="">
+            <a:extLst>
+              <a:ext uri="{C183D7F6-B498-43B3-948B-1728B52AA6E4}">
+                <adec:decorative xmlns:adec="http://schemas.microsoft.com/office/drawing/2017/decorative" val="1"/>
+              </a:ext>
+            </a:extLst>
+          </p:cNvPr>
+          <p:cNvPicPr>
+            <a:picLocks noChangeAspect="1"/>
+          </p:cNvPicPr>
+          <p:nvPr/>
+        </p:nvPicPr>
+        <p:blipFill>
+          <a:blip r:embed="rId4">
+            <a:extLst>
+              <a:ext uri="{96DAC541-7B7A-43D3-8B79-37D633B846F1}">
+                <asvg:svgBlip xmlns:asvg="http://schemas.microsoft.com/office/drawing/2016/SVG/main" r:embed="rId5"/>
+              </a:ext>
+            </a:extLst>
+          </a:blip>
+          <a:stretch>
+            <a:fillRect/>
+          </a:stretch>
+        </p:blipFill>
+        <p:spPr>
+          <a:xfrm>
+            <a:off x="0" y="0"/>
+            <a:ext cx="12192000" cy="6858000"/>
+          </a:xfrm>
+          <a:prstGeom prst="rect">
+            <a:avLst/>
+          </a:prstGeom>
+        </p:spPr>
+      </p:pic>
+      <p:pic>
+        <p:nvPicPr>
+          <p:cNvPr id="4" name="Decor accent-band" descr="">
+            <a:extLst>
+              <a:ext uri="{C183D7F6-B498-43B3-948B-1728B52AA6E4}">
+                <adec:decorative xmlns:adec="http://schemas.microsoft.com/office/drawing/2017/decorative" val="1"/>
+              </a:ext>
+            </a:extLst>
+          </p:cNvPr>
+          <p:cNvPicPr>
+            <a:picLocks noChangeAspect="1"/>
+          </p:cNvPicPr>
+          <p:nvPr/>
+        </p:nvPicPr>
+        <p:blipFill>
+          <a:blip r:embed="rId2">
+            <a:extLst>
+              <a:ext uri="{96DAC541-7B7A-43D3-8B79-37D633B846F1}">
+                <asvg:svgBlip xmlns:asvg="http://schemas.microsoft.com/office/drawing/2016/SVG/main" r:embed="rId3"/>
+              </a:ext>
+            </a:extLst>
+          </a:blip>
+          <a:stretch>
+            <a:fillRect/>
+          </a:stretch>
+        </p:blipFill>
+        <p:spPr>
+          <a:xfrm>
+            <a:off x="0" y="6705600"/>
+            <a:ext cx="12192000" cy="152400"/>
+          </a:xfrm>
+          <a:prstGeom prst="rect">
+            <a:avLst/>
+          </a:prstGeom>
+        </p:spPr>
+      </p:pic>
+      <p:sp>
+        <p:nvSpPr>
+          <p:cNvPr id="2" name="Title 1"/>
+          <p:cNvSpPr>
+            <a:spLocks noGrp="1"/>
+          </p:cNvSpPr>
+          <p:nvPr>
+            <p:ph type="title"/>
+          </p:nvPr>
+        </p:nvSpPr>
+        <p:spPr>
+          <a:xfrm>
+            <a:off x="762000" y="2286000"/>
+            <a:ext cx="6477000" cy="1619250"/>
+          </a:xfrm>
+        </p:spPr>
+        <p:txBody>
+          <a:bodyPr anchor="b">
+            <a:normAutofit/>
+          </a:bodyPr>
+          <a:lstStyle>
+            <a:lvl1pPr marL="0" indent="0" algn="l">
+              <a:buNone/>
+              <a:defRPr sz="6000" b="1">
+                <a:solidFill>
+                  <a:schemeClr val="tx1"/>
+                </a:solidFill>
+                <a:latin typeface="+mj-lt"/>
+                <a:ea typeface="+mj-ea"/>
+                <a:cs typeface="+mj-cs"/>
+              </a:defRPr>
+            </a:lvl1pPr>
+          </a:lstStyle>
+          <a:p>
+            <a:r>
+              <a:rPr lang="en-US"/>
+              <a:t>Thank you</a:t>
+            </a:r>
+            <a:endParaRPr lang="en-US"/>
+          </a:p>
+        </p:txBody>
+      </p:sp>
+      <p:sp>
+        <p:nvSpPr>
+          <p:cNvPr id="3" name="Contact 2"/>
+          <p:cNvSpPr>
+            <a:spLocks noGrp="1"/>
+          </p:cNvSpPr>
+          <p:nvPr>
+            <p:ph type="body" idx="1"/>
+          </p:nvPr>
+        </p:nvSpPr>
+        <p:spPr>
+          <a:xfrm>
+            <a:off x="762000" y="4191000"/>
+            <a:ext cx="6477000" cy="1619250"/>
+          </a:xfrm>
+        </p:spPr>
+        <p:txBody>
+          <a:bodyPr anchor="t">
+            <a:normAutofit/>
+          </a:bodyPr>
+          <a:lstStyle>
+            <a:lvl1pPr marL="0" indent="0" algn="l">
+              <a:lnSpc>
+                <a:spcPct val="120000"/>
+              </a:lnSpc>
+              <a:buNone/>
+              <a:defRPr sz="2000">
+                <a:solidFill>
+                  <a:schemeClr val="tx2"/>
+                </a:solidFill>
+                <a:latin typeface="+mn-lt"/>
+                <a:ea typeface="+mn-ea"/>
+                <a:cs typeface="+mn-cs"/>
+              </a:defRPr>
+            </a:lvl1pPr>
+          </a:lstStyle>
+          <a:p>
+            <a:r>
+              <a:rPr lang="en-US"/>
+              <a:t>Questions · email · website</a:t>
+            </a:r>
+            <a:endParaRPr lang="en-US"/>
+          </a:p>
+        </p:txBody>
+      </p:sp>
+    </p:spTree>
+  </p:cSld>
+  <p:clrMapOvr>
+    <a:masterClrMapping/>
+  </p:clrMapOvr>
+</p:sldLayout>
+</file>
+
 <file path=ppt/slideLayouts/slideLayout2.xml><?xml version="1.0" encoding="utf-8"?>
 <p:sldLayout xmlns:a="http://schemas.openxmlformats.org/drawingml/2006/main" xmlns:r="http://schemas.openxmlformats.org/officeDocument/2006/relationships" xmlns:p="http://schemas.openxmlformats.org/presentationml/2006/main" type="secHead" showMasterSp="0" preserve="1">
   <p:cSld name="Section">
@@ -484,8 +966,8 @@
         </p:nvSpPr>
         <p:spPr>
           <a:xfrm>
-            <a:off x="609600" y="5943600"/>
-            <a:ext cx="10972800" cy="419100"/>
+            <a:off x="609600" y="5905500"/>
+            <a:ext cx="10972800" cy="381000"/>
           </a:xfrm>
         </p:spPr>
         <p:txBody>
@@ -510,6 +992,132 @@
               <a:rPr lang="en-US"/>
               <a:t>Caption</a:t>
             </a:r>
+            <a:endParaRPr lang="en-US"/>
+          </a:p>
+        </p:txBody>
+      </p:sp>
+      <p:sp>
+        <p:nvSpPr>
+          <p:cNvPr id="50" name="Date Placeholder"/>
+          <p:cNvSpPr>
+            <a:spLocks noGrp="1"/>
+          </p:cNvSpPr>
+          <p:nvPr>
+            <p:ph type="dt" sz="half" idx="10"/>
+          </p:nvPr>
+        </p:nvSpPr>
+        <p:spPr>
+          <a:xfrm>
+            <a:off x="7239000" y="6515100"/>
+            <a:ext cx="3048000" cy="228600"/>
+          </a:xfrm>
+        </p:spPr>
+        <p:txBody>
+          <a:bodyPr anchor="ctr" lIns="0" tIns="0" rIns="0" bIns="0">
+            <a:normAutofit/>
+          </a:bodyPr>
+          <a:lstStyle>
+            <a:lvl1pPr marL="0" indent="0" algn="r">
+              <a:buNone/>
+              <a:defRPr sz="1000">
+                <a:solidFill>
+                  <a:schemeClr val="tx2"/>
+                </a:solidFill>
+                <a:latin typeface="+mn-lt"/>
+                <a:ea typeface="+mn-ea"/>
+                <a:cs typeface="+mn-cs"/>
+              </a:defRPr>
+            </a:lvl1pPr>
+          </a:lstStyle>
+          <a:p>
+            <a:r>
+              <a:rPr lang="en-US"/>
+              <a:t>Date</a:t>
+            </a:r>
+            <a:endParaRPr lang="en-US"/>
+          </a:p>
+        </p:txBody>
+      </p:sp>
+      <p:sp>
+        <p:nvSpPr>
+          <p:cNvPr id="51" name="Footer Placeholder"/>
+          <p:cNvSpPr>
+            <a:spLocks noGrp="1"/>
+          </p:cNvSpPr>
+          <p:nvPr>
+            <p:ph type="ftr" sz="quarter" idx="11"/>
+          </p:nvPr>
+        </p:nvSpPr>
+        <p:spPr>
+          <a:xfrm>
+            <a:off x="609600" y="6515100"/>
+            <a:ext cx="6096000" cy="228600"/>
+          </a:xfrm>
+        </p:spPr>
+        <p:txBody>
+          <a:bodyPr anchor="ctr" lIns="0" tIns="0" rIns="0" bIns="0">
+            <a:normAutofit/>
+          </a:bodyPr>
+          <a:lstStyle>
+            <a:lvl1pPr marL="0" indent="0" algn="l">
+              <a:buNone/>
+              <a:defRPr sz="1000">
+                <a:solidFill>
+                  <a:schemeClr val="tx2"/>
+                </a:solidFill>
+                <a:latin typeface="+mn-lt"/>
+                <a:ea typeface="+mn-ea"/>
+                <a:cs typeface="+mn-cs"/>
+              </a:defRPr>
+            </a:lvl1pPr>
+          </a:lstStyle>
+          <a:p>
+            <a:r>
+              <a:rPr lang="en-US"/>
+              <a:t>Footer</a:t>
+            </a:r>
+            <a:endParaRPr lang="en-US"/>
+          </a:p>
+        </p:txBody>
+      </p:sp>
+      <p:sp>
+        <p:nvSpPr>
+          <p:cNvPr id="52" name="Slide Number Placeholder"/>
+          <p:cNvSpPr>
+            <a:spLocks noGrp="1"/>
+          </p:cNvSpPr>
+          <p:nvPr>
+            <p:ph type="sldNum" sz="quarter" idx="12"/>
+          </p:nvPr>
+        </p:nvSpPr>
+        <p:spPr>
+          <a:xfrm>
+            <a:off x="10477500" y="6515100"/>
+            <a:ext cx="1104900" cy="228600"/>
+          </a:xfrm>
+        </p:spPr>
+        <p:txBody>
+          <a:bodyPr anchor="ctr" lIns="0" tIns="0" rIns="0" bIns="0">
+            <a:normAutofit/>
+          </a:bodyPr>
+          <a:lstStyle>
+            <a:lvl1pPr marL="0" indent="0" algn="r">
+              <a:buNone/>
+              <a:defRPr sz="1000" b="1">
+                <a:solidFill>
+                  <a:schemeClr val="tx2"/>
+                </a:solidFill>
+                <a:latin typeface="+mn-lt"/>
+                <a:ea typeface="+mn-ea"/>
+                <a:cs typeface="+mn-cs"/>
+              </a:defRPr>
+            </a:lvl1pPr>
+          </a:lstStyle>
+          <a:p>
+            <a:fld id="{B6F15528-21DE-4FAA-801E-634DDDAF4B2B}" type="slidenum">
+              <a:rPr lang="en-US"/>
+              <a:t>‹#›</a:t>
+            </a:fld>
             <a:endParaRPr lang="en-US"/>
           </a:p>
         </p:txBody>
@@ -713,6 +1321,132 @@
           </a:p>
         </p:txBody>
       </p:sp>
+      <p:sp>
+        <p:nvSpPr>
+          <p:cNvPr id="50" name="Date Placeholder"/>
+          <p:cNvSpPr>
+            <a:spLocks noGrp="1"/>
+          </p:cNvSpPr>
+          <p:nvPr>
+            <p:ph type="dt" sz="half" idx="10"/>
+          </p:nvPr>
+        </p:nvSpPr>
+        <p:spPr>
+          <a:xfrm>
+            <a:off x="7239000" y="6515100"/>
+            <a:ext cx="3048000" cy="228600"/>
+          </a:xfrm>
+        </p:spPr>
+        <p:txBody>
+          <a:bodyPr anchor="ctr" lIns="0" tIns="0" rIns="0" bIns="0">
+            <a:normAutofit/>
+          </a:bodyPr>
+          <a:lstStyle>
+            <a:lvl1pPr marL="0" indent="0" algn="r">
+              <a:buNone/>
+              <a:defRPr sz="1000">
+                <a:solidFill>
+                  <a:schemeClr val="tx2"/>
+                </a:solidFill>
+                <a:latin typeface="+mn-lt"/>
+                <a:ea typeface="+mn-ea"/>
+                <a:cs typeface="+mn-cs"/>
+              </a:defRPr>
+            </a:lvl1pPr>
+          </a:lstStyle>
+          <a:p>
+            <a:r>
+              <a:rPr lang="en-US"/>
+              <a:t>Date</a:t>
+            </a:r>
+            <a:endParaRPr lang="en-US"/>
+          </a:p>
+        </p:txBody>
+      </p:sp>
+      <p:sp>
+        <p:nvSpPr>
+          <p:cNvPr id="51" name="Footer Placeholder"/>
+          <p:cNvSpPr>
+            <a:spLocks noGrp="1"/>
+          </p:cNvSpPr>
+          <p:nvPr>
+            <p:ph type="ftr" sz="quarter" idx="11"/>
+          </p:nvPr>
+        </p:nvSpPr>
+        <p:spPr>
+          <a:xfrm>
+            <a:off x="609600" y="6515100"/>
+            <a:ext cx="6096000" cy="228600"/>
+          </a:xfrm>
+        </p:spPr>
+        <p:txBody>
+          <a:bodyPr anchor="ctr" lIns="0" tIns="0" rIns="0" bIns="0">
+            <a:normAutofit/>
+          </a:bodyPr>
+          <a:lstStyle>
+            <a:lvl1pPr marL="0" indent="0" algn="l">
+              <a:buNone/>
+              <a:defRPr sz="1000">
+                <a:solidFill>
+                  <a:schemeClr val="tx2"/>
+                </a:solidFill>
+                <a:latin typeface="+mn-lt"/>
+                <a:ea typeface="+mn-ea"/>
+                <a:cs typeface="+mn-cs"/>
+              </a:defRPr>
+            </a:lvl1pPr>
+          </a:lstStyle>
+          <a:p>
+            <a:r>
+              <a:rPr lang="en-US"/>
+              <a:t>Footer</a:t>
+            </a:r>
+            <a:endParaRPr lang="en-US"/>
+          </a:p>
+        </p:txBody>
+      </p:sp>
+      <p:sp>
+        <p:nvSpPr>
+          <p:cNvPr id="52" name="Slide Number Placeholder"/>
+          <p:cNvSpPr>
+            <a:spLocks noGrp="1"/>
+          </p:cNvSpPr>
+          <p:nvPr>
+            <p:ph type="sldNum" sz="quarter" idx="12"/>
+          </p:nvPr>
+        </p:nvSpPr>
+        <p:spPr>
+          <a:xfrm>
+            <a:off x="10477500" y="6515100"/>
+            <a:ext cx="1104900" cy="228600"/>
+          </a:xfrm>
+        </p:spPr>
+        <p:txBody>
+          <a:bodyPr anchor="ctr" lIns="0" tIns="0" rIns="0" bIns="0">
+            <a:normAutofit/>
+          </a:bodyPr>
+          <a:lstStyle>
+            <a:lvl1pPr marL="0" indent="0" algn="r">
+              <a:buNone/>
+              <a:defRPr sz="1000" b="1">
+                <a:solidFill>
+                  <a:schemeClr val="tx2"/>
+                </a:solidFill>
+                <a:latin typeface="+mn-lt"/>
+                <a:ea typeface="+mn-ea"/>
+                <a:cs typeface="+mn-cs"/>
+              </a:defRPr>
+            </a:lvl1pPr>
+          </a:lstStyle>
+          <a:p>
+            <a:fld id="{B6F15528-21DE-4FAA-801E-634DDDAF4B2B}" type="slidenum">
+              <a:rPr lang="en-US"/>
+              <a:t>‹#›</a:t>
+            </a:fld>
+            <a:endParaRPr lang="en-US"/>
+          </a:p>
+        </p:txBody>
+      </p:sp>
     </p:spTree>
   </p:cSld>
   <p:clrMapOvr>
@@ -794,6 +1528,1636 @@
               <a:rPr lang="en-US"/>
               <a:t>Bullet point</a:t>
             </a:r>
+            <a:endParaRPr lang="en-US"/>
+          </a:p>
+        </p:txBody>
+      </p:sp>
+      <p:sp>
+        <p:nvSpPr>
+          <p:cNvPr id="50" name="Date Placeholder"/>
+          <p:cNvSpPr>
+            <a:spLocks noGrp="1"/>
+          </p:cNvSpPr>
+          <p:nvPr>
+            <p:ph type="dt" sz="half" idx="10"/>
+          </p:nvPr>
+        </p:nvSpPr>
+        <p:spPr>
+          <a:xfrm>
+            <a:off x="7239000" y="6515100"/>
+            <a:ext cx="3048000" cy="228600"/>
+          </a:xfrm>
+        </p:spPr>
+        <p:txBody>
+          <a:bodyPr anchor="ctr" lIns="0" tIns="0" rIns="0" bIns="0">
+            <a:normAutofit/>
+          </a:bodyPr>
+          <a:lstStyle>
+            <a:lvl1pPr marL="0" indent="0" algn="r">
+              <a:buNone/>
+              <a:defRPr sz="1000">
+                <a:solidFill>
+                  <a:schemeClr val="tx2"/>
+                </a:solidFill>
+                <a:latin typeface="+mn-lt"/>
+                <a:ea typeface="+mn-ea"/>
+                <a:cs typeface="+mn-cs"/>
+              </a:defRPr>
+            </a:lvl1pPr>
+          </a:lstStyle>
+          <a:p>
+            <a:r>
+              <a:rPr lang="en-US"/>
+              <a:t>Date</a:t>
+            </a:r>
+            <a:endParaRPr lang="en-US"/>
+          </a:p>
+        </p:txBody>
+      </p:sp>
+      <p:sp>
+        <p:nvSpPr>
+          <p:cNvPr id="51" name="Footer Placeholder"/>
+          <p:cNvSpPr>
+            <a:spLocks noGrp="1"/>
+          </p:cNvSpPr>
+          <p:nvPr>
+            <p:ph type="ftr" sz="quarter" idx="11"/>
+          </p:nvPr>
+        </p:nvSpPr>
+        <p:spPr>
+          <a:xfrm>
+            <a:off x="609600" y="6515100"/>
+            <a:ext cx="6096000" cy="228600"/>
+          </a:xfrm>
+        </p:spPr>
+        <p:txBody>
+          <a:bodyPr anchor="ctr" lIns="0" tIns="0" rIns="0" bIns="0">
+            <a:normAutofit/>
+          </a:bodyPr>
+          <a:lstStyle>
+            <a:lvl1pPr marL="0" indent="0" algn="l">
+              <a:buNone/>
+              <a:defRPr sz="1000">
+                <a:solidFill>
+                  <a:schemeClr val="tx2"/>
+                </a:solidFill>
+                <a:latin typeface="+mn-lt"/>
+                <a:ea typeface="+mn-ea"/>
+                <a:cs typeface="+mn-cs"/>
+              </a:defRPr>
+            </a:lvl1pPr>
+          </a:lstStyle>
+          <a:p>
+            <a:r>
+              <a:rPr lang="en-US"/>
+              <a:t>Footer</a:t>
+            </a:r>
+            <a:endParaRPr lang="en-US"/>
+          </a:p>
+        </p:txBody>
+      </p:sp>
+      <p:sp>
+        <p:nvSpPr>
+          <p:cNvPr id="52" name="Slide Number Placeholder"/>
+          <p:cNvSpPr>
+            <a:spLocks noGrp="1"/>
+          </p:cNvSpPr>
+          <p:nvPr>
+            <p:ph type="sldNum" sz="quarter" idx="12"/>
+          </p:nvPr>
+        </p:nvSpPr>
+        <p:spPr>
+          <a:xfrm>
+            <a:off x="10477500" y="6515100"/>
+            <a:ext cx="1104900" cy="228600"/>
+          </a:xfrm>
+        </p:spPr>
+        <p:txBody>
+          <a:bodyPr anchor="ctr" lIns="0" tIns="0" rIns="0" bIns="0">
+            <a:normAutofit/>
+          </a:bodyPr>
+          <a:lstStyle>
+            <a:lvl1pPr marL="0" indent="0" algn="r">
+              <a:buNone/>
+              <a:defRPr sz="1000" b="1">
+                <a:solidFill>
+                  <a:schemeClr val="tx2"/>
+                </a:solidFill>
+                <a:latin typeface="+mn-lt"/>
+                <a:ea typeface="+mn-ea"/>
+                <a:cs typeface="+mn-cs"/>
+              </a:defRPr>
+            </a:lvl1pPr>
+          </a:lstStyle>
+          <a:p>
+            <a:fld id="{B6F15528-21DE-4FAA-801E-634DDDAF4B2B}" type="slidenum">
+              <a:rPr lang="en-US"/>
+              <a:t>‹#›</a:t>
+            </a:fld>
+            <a:endParaRPr lang="en-US"/>
+          </a:p>
+        </p:txBody>
+      </p:sp>
+    </p:spTree>
+  </p:cSld>
+  <p:clrMapOvr>
+    <a:masterClrMapping/>
+  </p:clrMapOvr>
+</p:sldLayout>
+</file>
+
+<file path=ppt/slideLayouts/slideLayout6.xml><?xml version="1.0" encoding="utf-8"?>
+<p:sldLayout xmlns:a="http://schemas.openxmlformats.org/drawingml/2006/main" xmlns:r="http://schemas.openxmlformats.org/officeDocument/2006/relationships" xmlns:p="http://schemas.openxmlformats.org/presentationml/2006/main" preserve="1">
+  <p:cSld name="Agenda">
+    <p:spTree>
+      <p:nvGrpSpPr>
+        <p:cNvPr id="1" name=""/>
+        <p:cNvGrpSpPr/>
+        <p:nvPr/>
+      </p:nvGrpSpPr>
+      <p:grpSpPr>
+        <a:xfrm>
+          <a:off x="0" y="0"/>
+          <a:ext cx="0" cy="0"/>
+          <a:chOff x="0" y="0"/>
+          <a:chExt cx="0" cy="0"/>
+        </a:xfrm>
+      </p:grpSpPr>
+      <p:pic>
+        <p:nvPicPr>
+          <p:cNvPr id="53" name="Decor agenda-helix-strip" descr="">
+            <a:extLst>
+              <a:ext uri="{C183D7F6-B498-43B3-948B-1728B52AA6E4}">
+                <adec:decorative xmlns:adec="http://schemas.microsoft.com/office/drawing/2017/decorative" val="1"/>
+              </a:ext>
+            </a:extLst>
+          </p:cNvPr>
+          <p:cNvPicPr>
+            <a:picLocks noChangeAspect="1"/>
+          </p:cNvPicPr>
+          <p:nvPr/>
+        </p:nvPicPr>
+        <p:blipFill>
+          <a:blip r:embed="rId2">
+            <a:extLst>
+              <a:ext uri="{96DAC541-7B7A-43D3-8B79-37D633B846F1}">
+                <asvg:svgBlip xmlns:asvg="http://schemas.microsoft.com/office/drawing/2016/SVG/main" r:embed="rId3"/>
+              </a:ext>
+            </a:extLst>
+          </a:blip>
+          <a:stretch>
+            <a:fillRect/>
+          </a:stretch>
+        </p:blipFill>
+        <p:spPr>
+          <a:xfrm>
+            <a:off x="10096500" y="1428750"/>
+            <a:ext cx="1524000" cy="4762500"/>
+          </a:xfrm>
+          <a:prstGeom prst="rect">
+            <a:avLst/>
+          </a:prstGeom>
+        </p:spPr>
+      </p:pic>
+      <p:sp>
+        <p:nvSpPr>
+          <p:cNvPr id="2" name="Title 1"/>
+          <p:cNvSpPr>
+            <a:spLocks noGrp="1"/>
+          </p:cNvSpPr>
+          <p:nvPr>
+            <p:ph type="title"/>
+          </p:nvPr>
+        </p:nvSpPr>
+        <p:spPr>
+          <a:xfrm>
+            <a:off x="609600" y="342900"/>
+            <a:ext cx="9144000" cy="800100"/>
+          </a:xfrm>
+        </p:spPr>
+        <p:txBody>
+          <a:bodyPr anchor="b">
+            <a:normAutofit/>
+          </a:bodyPr>
+          <a:lstStyle/>
+          <a:p>
+            <a:r>
+              <a:rPr lang="en-US"/>
+              <a:t>Agenda</a:t>
+            </a:r>
+            <a:endParaRPr lang="en-US"/>
+          </a:p>
+        </p:txBody>
+      </p:sp>
+      <p:sp>
+        <p:nvSpPr>
+          <p:cNvPr id="3" name="Agenda 2"/>
+          <p:cNvSpPr>
+            <a:spLocks noGrp="1"/>
+          </p:cNvSpPr>
+          <p:nvPr>
+            <p:ph type="body" idx="1"/>
+          </p:nvPr>
+        </p:nvSpPr>
+        <p:spPr>
+          <a:xfrm>
+            <a:off x="609600" y="1428750"/>
+            <a:ext cx="8953500" cy="4762500"/>
+          </a:xfrm>
+        </p:spPr>
+        <p:txBody>
+          <a:bodyPr anchor="t">
+            <a:normAutofit/>
+          </a:bodyPr>
+          <a:lstStyle>
+            <a:lvl1pPr marL="640080" indent="-640080" algn="l">
+              <a:lnSpc>
+                <a:spcPct val="100000"/>
+              </a:lnSpc>
+              <a:spcBef>
+                <a:spcPts val="1800"/>
+              </a:spcBef>
+              <a:buClr>
+                <a:schemeClr val="accent1"/>
+              </a:buClr>
+              <a:buSzPct val="110000"/>
+              <a:buFont typeface="+mj-lt"/>
+              <a:buAutoNum type="arabicPeriod"/>
+              <a:defRPr sz="2400" b="1">
+                <a:solidFill>
+                  <a:schemeClr val="tx1"/>
+                </a:solidFill>
+                <a:latin typeface="+mj-lt"/>
+                <a:ea typeface="+mj-ea"/>
+                <a:cs typeface="+mj-cs"/>
+              </a:defRPr>
+            </a:lvl1pPr>
+          </a:lstStyle>
+          <a:p>
+            <a:r>
+              <a:rPr lang="en-US"/>
+              <a:t>Agenda item</a:t>
+            </a:r>
+            <a:endParaRPr lang="en-US"/>
+          </a:p>
+        </p:txBody>
+      </p:sp>
+      <p:sp>
+        <p:nvSpPr>
+          <p:cNvPr id="50" name="Date Placeholder"/>
+          <p:cNvSpPr>
+            <a:spLocks noGrp="1"/>
+          </p:cNvSpPr>
+          <p:nvPr>
+            <p:ph type="dt" sz="half" idx="10"/>
+          </p:nvPr>
+        </p:nvSpPr>
+        <p:spPr>
+          <a:xfrm>
+            <a:off x="7239000" y="6515100"/>
+            <a:ext cx="3048000" cy="228600"/>
+          </a:xfrm>
+        </p:spPr>
+        <p:txBody>
+          <a:bodyPr anchor="ctr" lIns="0" tIns="0" rIns="0" bIns="0">
+            <a:normAutofit/>
+          </a:bodyPr>
+          <a:lstStyle>
+            <a:lvl1pPr marL="0" indent="0" algn="r">
+              <a:buNone/>
+              <a:defRPr sz="1000">
+                <a:solidFill>
+                  <a:schemeClr val="tx2"/>
+                </a:solidFill>
+                <a:latin typeface="+mn-lt"/>
+                <a:ea typeface="+mn-ea"/>
+                <a:cs typeface="+mn-cs"/>
+              </a:defRPr>
+            </a:lvl1pPr>
+          </a:lstStyle>
+          <a:p>
+            <a:r>
+              <a:rPr lang="en-US"/>
+              <a:t>Date</a:t>
+            </a:r>
+            <a:endParaRPr lang="en-US"/>
+          </a:p>
+        </p:txBody>
+      </p:sp>
+      <p:sp>
+        <p:nvSpPr>
+          <p:cNvPr id="51" name="Footer Placeholder"/>
+          <p:cNvSpPr>
+            <a:spLocks noGrp="1"/>
+          </p:cNvSpPr>
+          <p:nvPr>
+            <p:ph type="ftr" sz="quarter" idx="11"/>
+          </p:nvPr>
+        </p:nvSpPr>
+        <p:spPr>
+          <a:xfrm>
+            <a:off x="609600" y="6515100"/>
+            <a:ext cx="6096000" cy="228600"/>
+          </a:xfrm>
+        </p:spPr>
+        <p:txBody>
+          <a:bodyPr anchor="ctr" lIns="0" tIns="0" rIns="0" bIns="0">
+            <a:normAutofit/>
+          </a:bodyPr>
+          <a:lstStyle>
+            <a:lvl1pPr marL="0" indent="0" algn="l">
+              <a:buNone/>
+              <a:defRPr sz="1000">
+                <a:solidFill>
+                  <a:schemeClr val="tx2"/>
+                </a:solidFill>
+                <a:latin typeface="+mn-lt"/>
+                <a:ea typeface="+mn-ea"/>
+                <a:cs typeface="+mn-cs"/>
+              </a:defRPr>
+            </a:lvl1pPr>
+          </a:lstStyle>
+          <a:p>
+            <a:r>
+              <a:rPr lang="en-US"/>
+              <a:t>Footer</a:t>
+            </a:r>
+            <a:endParaRPr lang="en-US"/>
+          </a:p>
+        </p:txBody>
+      </p:sp>
+      <p:sp>
+        <p:nvSpPr>
+          <p:cNvPr id="52" name="Slide Number Placeholder"/>
+          <p:cNvSpPr>
+            <a:spLocks noGrp="1"/>
+          </p:cNvSpPr>
+          <p:nvPr>
+            <p:ph type="sldNum" sz="quarter" idx="12"/>
+          </p:nvPr>
+        </p:nvSpPr>
+        <p:spPr>
+          <a:xfrm>
+            <a:off x="10477500" y="6515100"/>
+            <a:ext cx="1104900" cy="228600"/>
+          </a:xfrm>
+        </p:spPr>
+        <p:txBody>
+          <a:bodyPr anchor="ctr" lIns="0" tIns="0" rIns="0" bIns="0">
+            <a:normAutofit/>
+          </a:bodyPr>
+          <a:lstStyle>
+            <a:lvl1pPr marL="0" indent="0" algn="r">
+              <a:buNone/>
+              <a:defRPr sz="1000" b="1">
+                <a:solidFill>
+                  <a:schemeClr val="tx2"/>
+                </a:solidFill>
+                <a:latin typeface="+mn-lt"/>
+                <a:ea typeface="+mn-ea"/>
+                <a:cs typeface="+mn-cs"/>
+              </a:defRPr>
+            </a:lvl1pPr>
+          </a:lstStyle>
+          <a:p>
+            <a:fld id="{B6F15528-21DE-4FAA-801E-634DDDAF4B2B}" type="slidenum">
+              <a:rPr lang="en-US"/>
+              <a:t>‹#›</a:t>
+            </a:fld>
+            <a:endParaRPr lang="en-US"/>
+          </a:p>
+        </p:txBody>
+      </p:sp>
+    </p:spTree>
+  </p:cSld>
+  <p:clrMapOvr>
+    <a:masterClrMapping/>
+  </p:clrMapOvr>
+</p:sldLayout>
+</file>
+
+<file path=ppt/slideLayouts/slideLayout7.xml><?xml version="1.0" encoding="utf-8"?>
+<p:sldLayout xmlns:a="http://schemas.openxmlformats.org/drawingml/2006/main" xmlns:r="http://schemas.openxmlformats.org/officeDocument/2006/relationships" xmlns:p="http://schemas.openxmlformats.org/presentationml/2006/main" preserve="1">
+  <p:cSld name="Quote">
+    <p:spTree>
+      <p:nvGrpSpPr>
+        <p:cNvPr id="1" name=""/>
+        <p:cNvGrpSpPr/>
+        <p:nvPr/>
+      </p:nvGrpSpPr>
+      <p:grpSpPr>
+        <a:xfrm>
+          <a:off x="0" y="0"/>
+          <a:ext cx="0" cy="0"/>
+          <a:chOff x="0" y="0"/>
+          <a:chExt cx="0" cy="0"/>
+        </a:xfrm>
+      </p:grpSpPr>
+      <p:pic>
+        <p:nvPicPr>
+          <p:cNvPr id="53" name="Decor molecule-corner" descr="">
+            <a:extLst>
+              <a:ext uri="{C183D7F6-B498-43B3-948B-1728B52AA6E4}">
+                <adec:decorative xmlns:adec="http://schemas.microsoft.com/office/drawing/2017/decorative" val="1"/>
+              </a:ext>
+            </a:extLst>
+          </p:cNvPr>
+          <p:cNvPicPr>
+            <a:picLocks noChangeAspect="1"/>
+          </p:cNvPicPr>
+          <p:nvPr/>
+        </p:nvPicPr>
+        <p:blipFill>
+          <a:blip r:embed="rId2">
+            <a:extLst>
+              <a:ext uri="{96DAC541-7B7A-43D3-8B79-37D633B846F1}">
+                <asvg:svgBlip xmlns:asvg="http://schemas.microsoft.com/office/drawing/2016/SVG/main" r:embed="rId3"/>
+              </a:ext>
+            </a:extLst>
+          </a:blip>
+          <a:stretch>
+            <a:fillRect/>
+          </a:stretch>
+        </p:blipFill>
+        <p:spPr>
+          <a:xfrm>
+            <a:off x="9906000" y="266700"/>
+            <a:ext cx="1714500" cy="857250"/>
+          </a:xfrm>
+          <a:prstGeom prst="rect">
+            <a:avLst/>
+          </a:prstGeom>
+        </p:spPr>
+      </p:pic>
+      <p:sp>
+        <p:nvSpPr>
+          <p:cNvPr id="2" name="Title 1"/>
+          <p:cNvSpPr>
+            <a:spLocks noGrp="1"/>
+          </p:cNvSpPr>
+          <p:nvPr>
+            <p:ph type="title"/>
+          </p:nvPr>
+        </p:nvSpPr>
+        <p:spPr>
+          <a:xfrm>
+            <a:off x="609600" y="342900"/>
+            <a:ext cx="9144000" cy="571500"/>
+          </a:xfrm>
+        </p:spPr>
+        <p:txBody>
+          <a:bodyPr anchor="b">
+            <a:normAutofit/>
+          </a:bodyPr>
+          <a:lstStyle>
+            <a:lvl1pPr marL="0" indent="0" algn="l">
+              <a:buNone/>
+              <a:defRPr sz="1600" b="1">
+                <a:solidFill>
+                  <a:schemeClr val="accent1"/>
+                </a:solidFill>
+                <a:latin typeface="+mj-lt"/>
+                <a:ea typeface="+mj-ea"/>
+                <a:cs typeface="+mj-cs"/>
+              </a:defRPr>
+            </a:lvl1pPr>
+          </a:lstStyle>
+          <a:p>
+            <a:r>
+              <a:rPr lang="en-US"/>
+              <a:t>Eyebrow</a:t>
+            </a:r>
+            <a:endParaRPr lang="en-US"/>
+          </a:p>
+        </p:txBody>
+      </p:sp>
+      <p:sp>
+        <p:nvSpPr>
+          <p:cNvPr id="3" name="Quote Mark"/>
+          <p:cNvSpPr txBox="1"/>
+          <p:nvPr userDrawn="1"/>
+        </p:nvSpPr>
+        <p:spPr>
+          <a:xfrm>
+            <a:off x="914400" y="1047750"/>
+            <a:ext cx="1047750" cy="2190750"/>
+          </a:xfrm>
+          <a:prstGeom prst="rect">
+            <a:avLst/>
+          </a:prstGeom>
+          <a:noFill/>
+        </p:spPr>
+        <p:txBody>
+          <a:bodyPr wrap="none" lIns="0" tIns="0" rIns="0" bIns="0" anchor="t"/>
+          <a:lstStyle/>
+          <a:p>
+            <a:r>
+              <a:rPr lang="en-US" sz="12000" b="1">
+                <a:solidFill>
+                  <a:schemeClr val="accent1"/>
+                </a:solidFill>
+                <a:latin typeface="+mj-lt"/>
+              </a:rPr>
+              <a:t>“</a:t>
+            </a:r>
+          </a:p>
+        </p:txBody>
+      </p:sp>
+      <p:sp>
+        <p:nvSpPr>
+          <p:cNvPr id="4" name="Quote 3"/>
+          <p:cNvSpPr>
+            <a:spLocks noGrp="1"/>
+          </p:cNvSpPr>
+          <p:nvPr>
+            <p:ph type="body" idx="1"/>
+          </p:nvPr>
+        </p:nvSpPr>
+        <p:spPr>
+          <a:xfrm>
+            <a:off x="1905000" y="1619250"/>
+            <a:ext cx="8572500" cy="2857500"/>
+          </a:xfrm>
+        </p:spPr>
+        <p:txBody>
+          <a:bodyPr anchor="ctr">
+            <a:normAutofit/>
+          </a:bodyPr>
+          <a:lstStyle>
+            <a:lvl1pPr marL="0" indent="0" algn="l">
+              <a:lnSpc>
+                <a:spcPct val="110000"/>
+              </a:lnSpc>
+              <a:buNone/>
+              <a:defRPr sz="3200" i="1">
+                <a:solidFill>
+                  <a:schemeClr val="tx1"/>
+                </a:solidFill>
+                <a:latin typeface="+mn-lt"/>
+                <a:ea typeface="+mn-ea"/>
+                <a:cs typeface="+mn-cs"/>
+              </a:defRPr>
+            </a:lvl1pPr>
+          </a:lstStyle>
+          <a:p>
+            <a:r>
+              <a:rPr lang="en-US"/>
+              <a:t>Quotation</a:t>
+            </a:r>
+            <a:endParaRPr lang="en-US"/>
+          </a:p>
+        </p:txBody>
+      </p:sp>
+      <p:sp>
+        <p:nvSpPr>
+          <p:cNvPr id="5" name="Attribution 4"/>
+          <p:cNvSpPr>
+            <a:spLocks noGrp="1"/>
+          </p:cNvSpPr>
+          <p:nvPr>
+            <p:ph type="body" sz="quarter" idx="13"/>
+          </p:nvPr>
+        </p:nvSpPr>
+        <p:spPr>
+          <a:xfrm>
+            <a:off x="1905000" y="4667250"/>
+            <a:ext cx="8572500" cy="571500"/>
+          </a:xfrm>
+        </p:spPr>
+        <p:txBody>
+          <a:bodyPr anchor="t">
+            <a:normAutofit/>
+          </a:bodyPr>
+          <a:lstStyle>
+            <a:lvl1pPr marL="0" indent="0" algn="l">
+              <a:buNone/>
+              <a:defRPr sz="1800" b="1">
+                <a:solidFill>
+                  <a:schemeClr val="tx2"/>
+                </a:solidFill>
+                <a:latin typeface="+mn-lt"/>
+                <a:ea typeface="+mn-ea"/>
+                <a:cs typeface="+mn-cs"/>
+              </a:defRPr>
+            </a:lvl1pPr>
+          </a:lstStyle>
+          <a:p>
+            <a:r>
+              <a:rPr lang="en-US"/>
+              <a:t>Name, role</a:t>
+            </a:r>
+            <a:endParaRPr lang="en-US"/>
+          </a:p>
+        </p:txBody>
+      </p:sp>
+      <p:sp>
+        <p:nvSpPr>
+          <p:cNvPr id="50" name="Date Placeholder"/>
+          <p:cNvSpPr>
+            <a:spLocks noGrp="1"/>
+          </p:cNvSpPr>
+          <p:nvPr>
+            <p:ph type="dt" sz="half" idx="10"/>
+          </p:nvPr>
+        </p:nvSpPr>
+        <p:spPr>
+          <a:xfrm>
+            <a:off x="7239000" y="6515100"/>
+            <a:ext cx="3048000" cy="228600"/>
+          </a:xfrm>
+        </p:spPr>
+        <p:txBody>
+          <a:bodyPr anchor="ctr" lIns="0" tIns="0" rIns="0" bIns="0">
+            <a:normAutofit/>
+          </a:bodyPr>
+          <a:lstStyle>
+            <a:lvl1pPr marL="0" indent="0" algn="r">
+              <a:buNone/>
+              <a:defRPr sz="1000">
+                <a:solidFill>
+                  <a:schemeClr val="tx2"/>
+                </a:solidFill>
+                <a:latin typeface="+mn-lt"/>
+                <a:ea typeface="+mn-ea"/>
+                <a:cs typeface="+mn-cs"/>
+              </a:defRPr>
+            </a:lvl1pPr>
+          </a:lstStyle>
+          <a:p>
+            <a:r>
+              <a:rPr lang="en-US"/>
+              <a:t>Date</a:t>
+            </a:r>
+            <a:endParaRPr lang="en-US"/>
+          </a:p>
+        </p:txBody>
+      </p:sp>
+      <p:sp>
+        <p:nvSpPr>
+          <p:cNvPr id="51" name="Footer Placeholder"/>
+          <p:cNvSpPr>
+            <a:spLocks noGrp="1"/>
+          </p:cNvSpPr>
+          <p:nvPr>
+            <p:ph type="ftr" sz="quarter" idx="11"/>
+          </p:nvPr>
+        </p:nvSpPr>
+        <p:spPr>
+          <a:xfrm>
+            <a:off x="609600" y="6515100"/>
+            <a:ext cx="6096000" cy="228600"/>
+          </a:xfrm>
+        </p:spPr>
+        <p:txBody>
+          <a:bodyPr anchor="ctr" lIns="0" tIns="0" rIns="0" bIns="0">
+            <a:normAutofit/>
+          </a:bodyPr>
+          <a:lstStyle>
+            <a:lvl1pPr marL="0" indent="0" algn="l">
+              <a:buNone/>
+              <a:defRPr sz="1000">
+                <a:solidFill>
+                  <a:schemeClr val="tx2"/>
+                </a:solidFill>
+                <a:latin typeface="+mn-lt"/>
+                <a:ea typeface="+mn-ea"/>
+                <a:cs typeface="+mn-cs"/>
+              </a:defRPr>
+            </a:lvl1pPr>
+          </a:lstStyle>
+          <a:p>
+            <a:r>
+              <a:rPr lang="en-US"/>
+              <a:t>Footer</a:t>
+            </a:r>
+            <a:endParaRPr lang="en-US"/>
+          </a:p>
+        </p:txBody>
+      </p:sp>
+      <p:sp>
+        <p:nvSpPr>
+          <p:cNvPr id="52" name="Slide Number Placeholder"/>
+          <p:cNvSpPr>
+            <a:spLocks noGrp="1"/>
+          </p:cNvSpPr>
+          <p:nvPr>
+            <p:ph type="sldNum" sz="quarter" idx="12"/>
+          </p:nvPr>
+        </p:nvSpPr>
+        <p:spPr>
+          <a:xfrm>
+            <a:off x="10477500" y="6515100"/>
+            <a:ext cx="1104900" cy="228600"/>
+          </a:xfrm>
+        </p:spPr>
+        <p:txBody>
+          <a:bodyPr anchor="ctr" lIns="0" tIns="0" rIns="0" bIns="0">
+            <a:normAutofit/>
+          </a:bodyPr>
+          <a:lstStyle>
+            <a:lvl1pPr marL="0" indent="0" algn="r">
+              <a:buNone/>
+              <a:defRPr sz="1000" b="1">
+                <a:solidFill>
+                  <a:schemeClr val="tx2"/>
+                </a:solidFill>
+                <a:latin typeface="+mn-lt"/>
+                <a:ea typeface="+mn-ea"/>
+                <a:cs typeface="+mn-cs"/>
+              </a:defRPr>
+            </a:lvl1pPr>
+          </a:lstStyle>
+          <a:p>
+            <a:fld id="{B6F15528-21DE-4FAA-801E-634DDDAF4B2B}" type="slidenum">
+              <a:rPr lang="en-US"/>
+              <a:t>‹#›</a:t>
+            </a:fld>
+            <a:endParaRPr lang="en-US"/>
+          </a:p>
+        </p:txBody>
+      </p:sp>
+    </p:spTree>
+  </p:cSld>
+  <p:clrMapOvr>
+    <a:masterClrMapping/>
+  </p:clrMapOvr>
+</p:sldLayout>
+</file>
+
+<file path=ppt/slideLayouts/slideLayout8.xml><?xml version="1.0" encoding="utf-8"?>
+<p:sldLayout xmlns:a="http://schemas.openxmlformats.org/drawingml/2006/main" xmlns:r="http://schemas.openxmlformats.org/officeDocument/2006/relationships" xmlns:p="http://schemas.openxmlformats.org/presentationml/2006/main" preserve="1">
+  <p:cSld name="Table">
+    <p:spTree>
+      <p:nvGrpSpPr>
+        <p:cNvPr id="1" name=""/>
+        <p:cNvGrpSpPr/>
+        <p:nvPr/>
+      </p:nvGrpSpPr>
+      <p:grpSpPr>
+        <a:xfrm>
+          <a:off x="0" y="0"/>
+          <a:ext cx="0" cy="0"/>
+          <a:chOff x="0" y="0"/>
+          <a:chExt cx="0" cy="0"/>
+        </a:xfrm>
+      </p:grpSpPr>
+      <p:pic>
+        <p:nvPicPr>
+          <p:cNvPr id="53" name="Decor molecule-corner" descr="">
+            <a:extLst>
+              <a:ext uri="{C183D7F6-B498-43B3-948B-1728B52AA6E4}">
+                <adec:decorative xmlns:adec="http://schemas.microsoft.com/office/drawing/2017/decorative" val="1"/>
+              </a:ext>
+            </a:extLst>
+          </p:cNvPr>
+          <p:cNvPicPr>
+            <a:picLocks noChangeAspect="1"/>
+          </p:cNvPicPr>
+          <p:nvPr/>
+        </p:nvPicPr>
+        <p:blipFill>
+          <a:blip r:embed="rId2">
+            <a:extLst>
+              <a:ext uri="{96DAC541-7B7A-43D3-8B79-37D633B846F1}">
+                <asvg:svgBlip xmlns:asvg="http://schemas.microsoft.com/office/drawing/2016/SVG/main" r:embed="rId3"/>
+              </a:ext>
+            </a:extLst>
+          </a:blip>
+          <a:stretch>
+            <a:fillRect/>
+          </a:stretch>
+        </p:blipFill>
+        <p:spPr>
+          <a:xfrm>
+            <a:off x="9906000" y="266700"/>
+            <a:ext cx="1714500" cy="857250"/>
+          </a:xfrm>
+          <a:prstGeom prst="rect">
+            <a:avLst/>
+          </a:prstGeom>
+        </p:spPr>
+      </p:pic>
+      <p:sp>
+        <p:nvSpPr>
+          <p:cNvPr id="2" name="Title 1"/>
+          <p:cNvSpPr>
+            <a:spLocks noGrp="1"/>
+          </p:cNvSpPr>
+          <p:nvPr>
+            <p:ph type="title"/>
+          </p:nvPr>
+        </p:nvSpPr>
+        <p:spPr>
+          <a:xfrm>
+            <a:off x="609600" y="342900"/>
+            <a:ext cx="9144000" cy="800100"/>
+          </a:xfrm>
+        </p:spPr>
+        <p:txBody>
+          <a:bodyPr anchor="b">
+            <a:normAutofit/>
+          </a:bodyPr>
+          <a:lstStyle/>
+          <a:p>
+            <a:r>
+              <a:rPr lang="en-US"/>
+              <a:t>Slide title</a:t>
+            </a:r>
+            <a:endParaRPr lang="en-US"/>
+          </a:p>
+        </p:txBody>
+      </p:sp>
+      <p:sp>
+        <p:nvSpPr>
+          <p:cNvPr id="3" name="Table 2"/>
+          <p:cNvSpPr>
+            <a:spLocks noGrp="1"/>
+          </p:cNvSpPr>
+          <p:nvPr>
+            <p:ph type="tbl" idx="13"/>
+          </p:nvPr>
+        </p:nvSpPr>
+        <p:spPr>
+          <a:xfrm>
+            <a:off x="609600" y="1333500"/>
+            <a:ext cx="10972800" cy="4762500"/>
+          </a:xfrm>
+        </p:spPr>
+        <p:txBody>
+          <a:bodyPr anchor="t">
+            <a:normAutofit/>
+          </a:bodyPr>
+          <a:lstStyle/>
+          <a:p>
+            <a:r>
+              <a:rPr lang="en-US"/>
+              <a:t>Table</a:t>
+            </a:r>
+            <a:endParaRPr lang="en-US"/>
+          </a:p>
+        </p:txBody>
+      </p:sp>
+      <p:sp>
+        <p:nvSpPr>
+          <p:cNvPr id="50" name="Date Placeholder"/>
+          <p:cNvSpPr>
+            <a:spLocks noGrp="1"/>
+          </p:cNvSpPr>
+          <p:nvPr>
+            <p:ph type="dt" sz="half" idx="10"/>
+          </p:nvPr>
+        </p:nvSpPr>
+        <p:spPr>
+          <a:xfrm>
+            <a:off x="7239000" y="6515100"/>
+            <a:ext cx="3048000" cy="228600"/>
+          </a:xfrm>
+        </p:spPr>
+        <p:txBody>
+          <a:bodyPr anchor="ctr" lIns="0" tIns="0" rIns="0" bIns="0">
+            <a:normAutofit/>
+          </a:bodyPr>
+          <a:lstStyle>
+            <a:lvl1pPr marL="0" indent="0" algn="r">
+              <a:buNone/>
+              <a:defRPr sz="1000">
+                <a:solidFill>
+                  <a:schemeClr val="tx2"/>
+                </a:solidFill>
+                <a:latin typeface="+mn-lt"/>
+                <a:ea typeface="+mn-ea"/>
+                <a:cs typeface="+mn-cs"/>
+              </a:defRPr>
+            </a:lvl1pPr>
+          </a:lstStyle>
+          <a:p>
+            <a:r>
+              <a:rPr lang="en-US"/>
+              <a:t>Date</a:t>
+            </a:r>
+            <a:endParaRPr lang="en-US"/>
+          </a:p>
+        </p:txBody>
+      </p:sp>
+      <p:sp>
+        <p:nvSpPr>
+          <p:cNvPr id="51" name="Footer Placeholder"/>
+          <p:cNvSpPr>
+            <a:spLocks noGrp="1"/>
+          </p:cNvSpPr>
+          <p:nvPr>
+            <p:ph type="ftr" sz="quarter" idx="11"/>
+          </p:nvPr>
+        </p:nvSpPr>
+        <p:spPr>
+          <a:xfrm>
+            <a:off x="609600" y="6515100"/>
+            <a:ext cx="6096000" cy="228600"/>
+          </a:xfrm>
+        </p:spPr>
+        <p:txBody>
+          <a:bodyPr anchor="ctr" lIns="0" tIns="0" rIns="0" bIns="0">
+            <a:normAutofit/>
+          </a:bodyPr>
+          <a:lstStyle>
+            <a:lvl1pPr marL="0" indent="0" algn="l">
+              <a:buNone/>
+              <a:defRPr sz="1000">
+                <a:solidFill>
+                  <a:schemeClr val="tx2"/>
+                </a:solidFill>
+                <a:latin typeface="+mn-lt"/>
+                <a:ea typeface="+mn-ea"/>
+                <a:cs typeface="+mn-cs"/>
+              </a:defRPr>
+            </a:lvl1pPr>
+          </a:lstStyle>
+          <a:p>
+            <a:r>
+              <a:rPr lang="en-US"/>
+              <a:t>Footer</a:t>
+            </a:r>
+            <a:endParaRPr lang="en-US"/>
+          </a:p>
+        </p:txBody>
+      </p:sp>
+      <p:sp>
+        <p:nvSpPr>
+          <p:cNvPr id="52" name="Slide Number Placeholder"/>
+          <p:cNvSpPr>
+            <a:spLocks noGrp="1"/>
+          </p:cNvSpPr>
+          <p:nvPr>
+            <p:ph type="sldNum" sz="quarter" idx="12"/>
+          </p:nvPr>
+        </p:nvSpPr>
+        <p:spPr>
+          <a:xfrm>
+            <a:off x="10477500" y="6515100"/>
+            <a:ext cx="1104900" cy="228600"/>
+          </a:xfrm>
+        </p:spPr>
+        <p:txBody>
+          <a:bodyPr anchor="ctr" lIns="0" tIns="0" rIns="0" bIns="0">
+            <a:normAutofit/>
+          </a:bodyPr>
+          <a:lstStyle>
+            <a:lvl1pPr marL="0" indent="0" algn="r">
+              <a:buNone/>
+              <a:defRPr sz="1000" b="1">
+                <a:solidFill>
+                  <a:schemeClr val="tx2"/>
+                </a:solidFill>
+                <a:latin typeface="+mn-lt"/>
+                <a:ea typeface="+mn-ea"/>
+                <a:cs typeface="+mn-cs"/>
+              </a:defRPr>
+            </a:lvl1pPr>
+          </a:lstStyle>
+          <a:p>
+            <a:fld id="{B6F15528-21DE-4FAA-801E-634DDDAF4B2B}" type="slidenum">
+              <a:rPr lang="en-US"/>
+              <a:t>‹#›</a:t>
+            </a:fld>
+            <a:endParaRPr lang="en-US"/>
+          </a:p>
+        </p:txBody>
+      </p:sp>
+    </p:spTree>
+  </p:cSld>
+  <p:clrMapOvr>
+    <a:masterClrMapping/>
+  </p:clrMapOvr>
+</p:sldLayout>
+</file>
+
+<file path=ppt/slideLayouts/slideLayout9.xml><?xml version="1.0" encoding="utf-8"?>
+<p:sldLayout xmlns:a="http://schemas.openxmlformats.org/drawingml/2006/main" xmlns:r="http://schemas.openxmlformats.org/officeDocument/2006/relationships" xmlns:p="http://schemas.openxmlformats.org/presentationml/2006/main" preserve="1">
+  <p:cSld name="KPI">
+    <p:spTree>
+      <p:nvGrpSpPr>
+        <p:cNvPr id="1" name=""/>
+        <p:cNvGrpSpPr/>
+        <p:nvPr/>
+      </p:nvGrpSpPr>
+      <p:grpSpPr>
+        <a:xfrm>
+          <a:off x="0" y="0"/>
+          <a:ext cx="0" cy="0"/>
+          <a:chOff x="0" y="0"/>
+          <a:chExt cx="0" cy="0"/>
+        </a:xfrm>
+      </p:grpSpPr>
+      <p:pic>
+        <p:nvPicPr>
+          <p:cNvPr id="54" name="Decor molecule-corner" descr="">
+            <a:extLst>
+              <a:ext uri="{C183D7F6-B498-43B3-948B-1728B52AA6E4}">
+                <adec:decorative xmlns:adec="http://schemas.microsoft.com/office/drawing/2017/decorative" val="1"/>
+              </a:ext>
+            </a:extLst>
+          </p:cNvPr>
+          <p:cNvPicPr>
+            <a:picLocks noChangeAspect="1"/>
+          </p:cNvPicPr>
+          <p:nvPr/>
+        </p:nvPicPr>
+        <p:blipFill>
+          <a:blip r:embed="rId4">
+            <a:extLst>
+              <a:ext uri="{96DAC541-7B7A-43D3-8B79-37D633B846F1}">
+                <asvg:svgBlip xmlns:asvg="http://schemas.microsoft.com/office/drawing/2016/SVG/main" r:embed="rId5"/>
+              </a:ext>
+            </a:extLst>
+          </a:blip>
+          <a:stretch>
+            <a:fillRect/>
+          </a:stretch>
+        </p:blipFill>
+        <p:spPr>
+          <a:xfrm>
+            <a:off x="9906000" y="266700"/>
+            <a:ext cx="1714500" cy="857250"/>
+          </a:xfrm>
+          <a:prstGeom prst="rect">
+            <a:avLst/>
+          </a:prstGeom>
+        </p:spPr>
+      </p:pic>
+      <p:pic>
+        <p:nvPicPr>
+          <p:cNvPr id="53" name="Decor kpi-medallion" descr="">
+            <a:extLst>
+              <a:ext uri="{C183D7F6-B498-43B3-948B-1728B52AA6E4}">
+                <adec:decorative xmlns:adec="http://schemas.microsoft.com/office/drawing/2017/decorative" val="1"/>
+              </a:ext>
+            </a:extLst>
+          </p:cNvPr>
+          <p:cNvPicPr>
+            <a:picLocks noChangeAspect="1"/>
+          </p:cNvPicPr>
+          <p:nvPr/>
+        </p:nvPicPr>
+        <p:blipFill>
+          <a:blip r:embed="rId2">
+            <a:extLst>
+              <a:ext uri="{96DAC541-7B7A-43D3-8B79-37D633B846F1}">
+                <asvg:svgBlip xmlns:asvg="http://schemas.microsoft.com/office/drawing/2016/SVG/main" r:embed="rId3"/>
+              </a:ext>
+            </a:extLst>
+          </a:blip>
+          <a:stretch>
+            <a:fillRect/>
+          </a:stretch>
+        </p:blipFill>
+        <p:spPr>
+          <a:xfrm>
+            <a:off x="609600" y="1333500"/>
+            <a:ext cx="4000500" cy="4000500"/>
+          </a:xfrm>
+          <a:prstGeom prst="rect">
+            <a:avLst/>
+          </a:prstGeom>
+        </p:spPr>
+      </p:pic>
+      <p:sp>
+        <p:nvSpPr>
+          <p:cNvPr id="2" name="Title 1"/>
+          <p:cNvSpPr>
+            <a:spLocks noGrp="1"/>
+          </p:cNvSpPr>
+          <p:nvPr>
+            <p:ph type="title"/>
+          </p:nvPr>
+        </p:nvSpPr>
+        <p:spPr>
+          <a:xfrm>
+            <a:off x="609600" y="342900"/>
+            <a:ext cx="9144000" cy="800100"/>
+          </a:xfrm>
+        </p:spPr>
+        <p:txBody>
+          <a:bodyPr anchor="b">
+            <a:normAutofit/>
+          </a:bodyPr>
+          <a:lstStyle/>
+          <a:p>
+            <a:r>
+              <a:rPr lang="en-US"/>
+              <a:t>Slide title</a:t>
+            </a:r>
+            <a:endParaRPr lang="en-US"/>
+          </a:p>
+        </p:txBody>
+      </p:sp>
+      <p:sp>
+        <p:nvSpPr>
+          <p:cNvPr id="3" name="KPI Value 2"/>
+          <p:cNvSpPr>
+            <a:spLocks noGrp="1"/>
+          </p:cNvSpPr>
+          <p:nvPr>
+            <p:ph type="body" sz="quarter" idx="13"/>
+          </p:nvPr>
+        </p:nvSpPr>
+        <p:spPr>
+          <a:xfrm>
+            <a:off x="800100" y="2343150"/>
+            <a:ext cx="3619500" cy="1295400"/>
+          </a:xfrm>
+        </p:spPr>
+        <p:txBody>
+          <a:bodyPr anchor="b" lIns="0" tIns="0" rIns="0" bIns="0">
+            <a:normAutofit/>
+          </a:bodyPr>
+          <a:lstStyle>
+            <a:lvl1pPr marL="0" indent="0" algn="ctr">
+              <a:buNone/>
+              <a:defRPr sz="8000" b="1">
+                <a:solidFill>
+                  <a:schemeClr val="accent1"/>
+                </a:solidFill>
+                <a:latin typeface="+mj-lt"/>
+                <a:ea typeface="+mj-ea"/>
+                <a:cs typeface="+mj-cs"/>
+              </a:defRPr>
+            </a:lvl1pPr>
+          </a:lstStyle>
+          <a:p>
+            <a:r>
+              <a:rPr lang="en-US"/>
+              <a:t>92%</a:t>
+            </a:r>
+            <a:endParaRPr lang="en-US"/>
+          </a:p>
+        </p:txBody>
+      </p:sp>
+      <p:sp>
+        <p:nvSpPr>
+          <p:cNvPr id="4" name="KPI Delta 3"/>
+          <p:cNvSpPr>
+            <a:spLocks noGrp="1"/>
+          </p:cNvSpPr>
+          <p:nvPr>
+            <p:ph type="body" sz="quarter" idx="14"/>
+          </p:nvPr>
+        </p:nvSpPr>
+        <p:spPr>
+          <a:xfrm>
+            <a:off x="1847850" y="3752850"/>
+            <a:ext cx="1524000" cy="419100"/>
+          </a:xfrm>
+          <a:prstGeom prst="roundRect">
+            <a:avLst>
+              <a:gd name="adj" fmla="val 50000"/>
+            </a:avLst>
+          </a:prstGeom>
+          <a:solidFill>
+            <a:schemeClr val="accent5"/>
+          </a:solidFill>
+        </p:spPr>
+        <p:txBody>
+          <a:bodyPr anchor="ctr" lIns="0" tIns="0" rIns="0" bIns="0">
+            <a:normAutofit/>
+          </a:bodyPr>
+          <a:lstStyle>
+            <a:lvl1pPr marL="0" indent="0" algn="ctr">
+              <a:buNone/>
+              <a:defRPr sz="1600" b="1">
+                <a:solidFill>
+                  <a:schemeClr val="dk1"/>
+                </a:solidFill>
+                <a:latin typeface="+mn-lt"/>
+                <a:ea typeface="+mn-ea"/>
+                <a:cs typeface="+mn-cs"/>
+              </a:defRPr>
+            </a:lvl1pPr>
+          </a:lstStyle>
+          <a:p>
+            <a:r>
+              <a:rPr lang="en-US"/>
+              <a:t>+12 pts</a:t>
+            </a:r>
+            <a:endParaRPr lang="en-US"/>
+          </a:p>
+        </p:txBody>
+      </p:sp>
+      <p:sp>
+        <p:nvSpPr>
+          <p:cNvPr id="5" name="KPI Label 4"/>
+          <p:cNvSpPr>
+            <a:spLocks noGrp="1"/>
+          </p:cNvSpPr>
+          <p:nvPr>
+            <p:ph type="body" sz="quarter" idx="15"/>
+          </p:nvPr>
+        </p:nvSpPr>
+        <p:spPr>
+          <a:xfrm>
+            <a:off x="609600" y="5486400"/>
+            <a:ext cx="4000500" cy="476250"/>
+          </a:xfrm>
+        </p:spPr>
+        <p:txBody>
+          <a:bodyPr anchor="t">
+            <a:normAutofit/>
+          </a:bodyPr>
+          <a:lstStyle>
+            <a:lvl1pPr marL="0" indent="0" algn="ctr">
+              <a:buNone/>
+              <a:defRPr sz="1600" b="1">
+                <a:solidFill>
+                  <a:schemeClr val="tx2"/>
+                </a:solidFill>
+                <a:latin typeface="+mn-lt"/>
+                <a:ea typeface="+mn-ea"/>
+                <a:cs typeface="+mn-cs"/>
+              </a:defRPr>
+            </a:lvl1pPr>
+          </a:lstStyle>
+          <a:p>
+            <a:r>
+              <a:rPr lang="en-US"/>
+              <a:t>What the number measures</a:t>
+            </a:r>
+            <a:endParaRPr lang="en-US"/>
+          </a:p>
+        </p:txBody>
+      </p:sp>
+      <p:sp>
+        <p:nvSpPr>
+          <p:cNvPr id="6" name="Stat Value 1"/>
+          <p:cNvSpPr>
+            <a:spLocks noGrp="1"/>
+          </p:cNvSpPr>
+          <p:nvPr>
+            <p:ph type="body" sz="quarter" idx="16"/>
+          </p:nvPr>
+        </p:nvSpPr>
+        <p:spPr>
+          <a:xfrm>
+            <a:off x="5334000" y="1619250"/>
+            <a:ext cx="6248400" cy="609600"/>
+          </a:xfrm>
+        </p:spPr>
+        <p:txBody>
+          <a:bodyPr anchor="b">
+            <a:normAutofit/>
+          </a:bodyPr>
+          <a:lstStyle>
+            <a:lvl1pPr marL="0" indent="0" algn="l">
+              <a:buNone/>
+              <a:defRPr sz="3600" b="1">
+                <a:solidFill>
+                  <a:schemeClr val="tx1"/>
+                </a:solidFill>
+                <a:latin typeface="+mj-lt"/>
+                <a:ea typeface="+mj-ea"/>
+                <a:cs typeface="+mj-cs"/>
+              </a:defRPr>
+            </a:lvl1pPr>
+          </a:lstStyle>
+          <a:p>
+            <a:r>
+              <a:rPr lang="en-US"/>
+              <a:t>48 h</a:t>
+            </a:r>
+            <a:endParaRPr lang="en-US"/>
+          </a:p>
+        </p:txBody>
+      </p:sp>
+      <p:sp>
+        <p:nvSpPr>
+          <p:cNvPr id="7" name="Stat Label 1"/>
+          <p:cNvSpPr>
+            <a:spLocks noGrp="1"/>
+          </p:cNvSpPr>
+          <p:nvPr>
+            <p:ph type="body" sz="quarter" idx="17"/>
+          </p:nvPr>
+        </p:nvSpPr>
+        <p:spPr>
+          <a:xfrm>
+            <a:off x="5334000" y="2247900"/>
+            <a:ext cx="6248400" cy="381000"/>
+          </a:xfrm>
+        </p:spPr>
+        <p:txBody>
+          <a:bodyPr anchor="t">
+            <a:normAutofit/>
+          </a:bodyPr>
+          <a:lstStyle>
+            <a:lvl1pPr marL="0" indent="0" algn="l">
+              <a:buNone/>
+              <a:defRPr sz="1600">
+                <a:solidFill>
+                  <a:schemeClr val="tx2"/>
+                </a:solidFill>
+                <a:latin typeface="+mn-lt"/>
+                <a:ea typeface="+mn-ea"/>
+                <a:cs typeface="+mn-cs"/>
+              </a:defRPr>
+            </a:lvl1pPr>
+          </a:lstStyle>
+          <a:p>
+            <a:r>
+              <a:rPr lang="en-US"/>
+              <a:t>Supporting stat</a:t>
+            </a:r>
+            <a:endParaRPr lang="en-US"/>
+          </a:p>
+        </p:txBody>
+      </p:sp>
+      <p:sp>
+        <p:nvSpPr>
+          <p:cNvPr id="8" name="Stat Value 2"/>
+          <p:cNvSpPr>
+            <a:spLocks noGrp="1"/>
+          </p:cNvSpPr>
+          <p:nvPr>
+            <p:ph type="body" sz="quarter" idx="18"/>
+          </p:nvPr>
+        </p:nvSpPr>
+        <p:spPr>
+          <a:xfrm>
+            <a:off x="5334000" y="3143250"/>
+            <a:ext cx="6248400" cy="609600"/>
+          </a:xfrm>
+        </p:spPr>
+        <p:txBody>
+          <a:bodyPr anchor="b">
+            <a:normAutofit/>
+          </a:bodyPr>
+          <a:lstStyle>
+            <a:lvl1pPr marL="0" indent="0" algn="l">
+              <a:buNone/>
+              <a:defRPr sz="3600" b="1">
+                <a:solidFill>
+                  <a:schemeClr val="tx1"/>
+                </a:solidFill>
+                <a:latin typeface="+mj-lt"/>
+                <a:ea typeface="+mj-ea"/>
+                <a:cs typeface="+mj-cs"/>
+              </a:defRPr>
+            </a:lvl1pPr>
+          </a:lstStyle>
+          <a:p>
+            <a:r>
+              <a:rPr lang="en-US"/>
+              <a:t>48 h</a:t>
+            </a:r>
+            <a:endParaRPr lang="en-US"/>
+          </a:p>
+        </p:txBody>
+      </p:sp>
+      <p:sp>
+        <p:nvSpPr>
+          <p:cNvPr id="9" name="Stat Label 2"/>
+          <p:cNvSpPr>
+            <a:spLocks noGrp="1"/>
+          </p:cNvSpPr>
+          <p:nvPr>
+            <p:ph type="body" sz="quarter" idx="19"/>
+          </p:nvPr>
+        </p:nvSpPr>
+        <p:spPr>
+          <a:xfrm>
+            <a:off x="5334000" y="3771900"/>
+            <a:ext cx="6248400" cy="381000"/>
+          </a:xfrm>
+        </p:spPr>
+        <p:txBody>
+          <a:bodyPr anchor="t">
+            <a:normAutofit/>
+          </a:bodyPr>
+          <a:lstStyle>
+            <a:lvl1pPr marL="0" indent="0" algn="l">
+              <a:buNone/>
+              <a:defRPr sz="1600">
+                <a:solidFill>
+                  <a:schemeClr val="tx2"/>
+                </a:solidFill>
+                <a:latin typeface="+mn-lt"/>
+                <a:ea typeface="+mn-ea"/>
+                <a:cs typeface="+mn-cs"/>
+              </a:defRPr>
+            </a:lvl1pPr>
+          </a:lstStyle>
+          <a:p>
+            <a:r>
+              <a:rPr lang="en-US"/>
+              <a:t>Supporting stat</a:t>
+            </a:r>
+            <a:endParaRPr lang="en-US"/>
+          </a:p>
+        </p:txBody>
+      </p:sp>
+      <p:sp>
+        <p:nvSpPr>
+          <p:cNvPr id="10" name="Stat Value 3"/>
+          <p:cNvSpPr>
+            <a:spLocks noGrp="1"/>
+          </p:cNvSpPr>
+          <p:nvPr>
+            <p:ph type="body" sz="quarter" idx="20"/>
+          </p:nvPr>
+        </p:nvSpPr>
+        <p:spPr>
+          <a:xfrm>
+            <a:off x="5334000" y="4667250"/>
+            <a:ext cx="6248400" cy="609600"/>
+          </a:xfrm>
+        </p:spPr>
+        <p:txBody>
+          <a:bodyPr anchor="b">
+            <a:normAutofit/>
+          </a:bodyPr>
+          <a:lstStyle>
+            <a:lvl1pPr marL="0" indent="0" algn="l">
+              <a:buNone/>
+              <a:defRPr sz="3600" b="1">
+                <a:solidFill>
+                  <a:schemeClr val="tx1"/>
+                </a:solidFill>
+                <a:latin typeface="+mj-lt"/>
+                <a:ea typeface="+mj-ea"/>
+                <a:cs typeface="+mj-cs"/>
+              </a:defRPr>
+            </a:lvl1pPr>
+          </a:lstStyle>
+          <a:p>
+            <a:r>
+              <a:rPr lang="en-US"/>
+              <a:t>48 h</a:t>
+            </a:r>
+            <a:endParaRPr lang="en-US"/>
+          </a:p>
+        </p:txBody>
+      </p:sp>
+      <p:sp>
+        <p:nvSpPr>
+          <p:cNvPr id="11" name="Stat Label 3"/>
+          <p:cNvSpPr>
+            <a:spLocks noGrp="1"/>
+          </p:cNvSpPr>
+          <p:nvPr>
+            <p:ph type="body" sz="quarter" idx="21"/>
+          </p:nvPr>
+        </p:nvSpPr>
+        <p:spPr>
+          <a:xfrm>
+            <a:off x="5334000" y="5295900"/>
+            <a:ext cx="6248400" cy="381000"/>
+          </a:xfrm>
+        </p:spPr>
+        <p:txBody>
+          <a:bodyPr anchor="t">
+            <a:normAutofit/>
+          </a:bodyPr>
+          <a:lstStyle>
+            <a:lvl1pPr marL="0" indent="0" algn="l">
+              <a:buNone/>
+              <a:defRPr sz="1600">
+                <a:solidFill>
+                  <a:schemeClr val="tx2"/>
+                </a:solidFill>
+                <a:latin typeface="+mn-lt"/>
+                <a:ea typeface="+mn-ea"/>
+                <a:cs typeface="+mn-cs"/>
+              </a:defRPr>
+            </a:lvl1pPr>
+          </a:lstStyle>
+          <a:p>
+            <a:r>
+              <a:rPr lang="en-US"/>
+              <a:t>Supporting stat</a:t>
+            </a:r>
+            <a:endParaRPr lang="en-US"/>
+          </a:p>
+        </p:txBody>
+      </p:sp>
+      <p:sp>
+        <p:nvSpPr>
+          <p:cNvPr id="50" name="Date Placeholder"/>
+          <p:cNvSpPr>
+            <a:spLocks noGrp="1"/>
+          </p:cNvSpPr>
+          <p:nvPr>
+            <p:ph type="dt" sz="half" idx="10"/>
+          </p:nvPr>
+        </p:nvSpPr>
+        <p:spPr>
+          <a:xfrm>
+            <a:off x="7239000" y="6515100"/>
+            <a:ext cx="3048000" cy="228600"/>
+          </a:xfrm>
+        </p:spPr>
+        <p:txBody>
+          <a:bodyPr anchor="ctr" lIns="0" tIns="0" rIns="0" bIns="0">
+            <a:normAutofit/>
+          </a:bodyPr>
+          <a:lstStyle>
+            <a:lvl1pPr marL="0" indent="0" algn="r">
+              <a:buNone/>
+              <a:defRPr sz="1000">
+                <a:solidFill>
+                  <a:schemeClr val="tx2"/>
+                </a:solidFill>
+                <a:latin typeface="+mn-lt"/>
+                <a:ea typeface="+mn-ea"/>
+                <a:cs typeface="+mn-cs"/>
+              </a:defRPr>
+            </a:lvl1pPr>
+          </a:lstStyle>
+          <a:p>
+            <a:r>
+              <a:rPr lang="en-US"/>
+              <a:t>Date</a:t>
+            </a:r>
+            <a:endParaRPr lang="en-US"/>
+          </a:p>
+        </p:txBody>
+      </p:sp>
+      <p:sp>
+        <p:nvSpPr>
+          <p:cNvPr id="51" name="Footer Placeholder"/>
+          <p:cNvSpPr>
+            <a:spLocks noGrp="1"/>
+          </p:cNvSpPr>
+          <p:nvPr>
+            <p:ph type="ftr" sz="quarter" idx="11"/>
+          </p:nvPr>
+        </p:nvSpPr>
+        <p:spPr>
+          <a:xfrm>
+            <a:off x="609600" y="6515100"/>
+            <a:ext cx="6096000" cy="228600"/>
+          </a:xfrm>
+        </p:spPr>
+        <p:txBody>
+          <a:bodyPr anchor="ctr" lIns="0" tIns="0" rIns="0" bIns="0">
+            <a:normAutofit/>
+          </a:bodyPr>
+          <a:lstStyle>
+            <a:lvl1pPr marL="0" indent="0" algn="l">
+              <a:buNone/>
+              <a:defRPr sz="1000">
+                <a:solidFill>
+                  <a:schemeClr val="tx2"/>
+                </a:solidFill>
+                <a:latin typeface="+mn-lt"/>
+                <a:ea typeface="+mn-ea"/>
+                <a:cs typeface="+mn-cs"/>
+              </a:defRPr>
+            </a:lvl1pPr>
+          </a:lstStyle>
+          <a:p>
+            <a:r>
+              <a:rPr lang="en-US"/>
+              <a:t>Footer</a:t>
+            </a:r>
+            <a:endParaRPr lang="en-US"/>
+          </a:p>
+        </p:txBody>
+      </p:sp>
+      <p:sp>
+        <p:nvSpPr>
+          <p:cNvPr id="52" name="Slide Number Placeholder"/>
+          <p:cNvSpPr>
+            <a:spLocks noGrp="1"/>
+          </p:cNvSpPr>
+          <p:nvPr>
+            <p:ph type="sldNum" sz="quarter" idx="12"/>
+          </p:nvPr>
+        </p:nvSpPr>
+        <p:spPr>
+          <a:xfrm>
+            <a:off x="10477500" y="6515100"/>
+            <a:ext cx="1104900" cy="228600"/>
+          </a:xfrm>
+        </p:spPr>
+        <p:txBody>
+          <a:bodyPr anchor="ctr" lIns="0" tIns="0" rIns="0" bIns="0">
+            <a:normAutofit/>
+          </a:bodyPr>
+          <a:lstStyle>
+            <a:lvl1pPr marL="0" indent="0" algn="r">
+              <a:buNone/>
+              <a:defRPr sz="1000" b="1">
+                <a:solidFill>
+                  <a:schemeClr val="tx2"/>
+                </a:solidFill>
+                <a:latin typeface="+mn-lt"/>
+                <a:ea typeface="+mn-ea"/>
+                <a:cs typeface="+mn-cs"/>
+              </a:defRPr>
+            </a:lvl1pPr>
+          </a:lstStyle>
+          <a:p>
+            <a:fld id="{B6F15528-21DE-4FAA-801E-634DDDAF4B2B}" type="slidenum">
+              <a:rPr lang="en-US"/>
+              <a:t>‹#›</a:t>
+            </a:fld>
             <a:endParaRPr lang="en-US"/>
           </a:p>
         </p:txBody>
@@ -830,7 +3194,7 @@
       </p:grpSpPr>
       <p:pic>
         <p:nvPicPr>
-          <p:cNvPr id="4" name="Decor footer-strip" descr="">
+          <p:cNvPr id="7" name="Decor footer-strip" descr="">
             <a:extLst>
               <a:ext uri="{C183D7F6-B498-43B3-948B-1728B52AA6E4}">
                 <adec:decorative xmlns:adec="http://schemas.microsoft.com/office/drawing/2017/decorative" val="1"/>
@@ -856,8 +3220,8 @@
         </p:blipFill>
         <p:spPr>
           <a:xfrm>
-            <a:off x="0" y="6438900"/>
-            <a:ext cx="12192000" cy="342900"/>
+            <a:off x="0" y="6305550"/>
+            <a:ext cx="12192000" cy="190500"/>
           </a:xfrm>
           <a:prstGeom prst="rect">
             <a:avLst/>
@@ -920,6 +3284,132 @@
               <a:rPr lang="en-US"/>
               <a:t>Bullet point</a:t>
             </a:r>
+            <a:endParaRPr lang="en-US"/>
+          </a:p>
+        </p:txBody>
+      </p:sp>
+      <p:sp>
+        <p:nvSpPr>
+          <p:cNvPr id="4" name="Date Placeholder"/>
+          <p:cNvSpPr>
+            <a:spLocks noGrp="1"/>
+          </p:cNvSpPr>
+          <p:nvPr>
+            <p:ph type="dt" sz="half" idx="2"/>
+          </p:nvPr>
+        </p:nvSpPr>
+        <p:spPr>
+          <a:xfrm>
+            <a:off x="7239000" y="6515100"/>
+            <a:ext cx="3048000" cy="228600"/>
+          </a:xfrm>
+        </p:spPr>
+        <p:txBody>
+          <a:bodyPr anchor="ctr" lIns="0" tIns="0" rIns="0" bIns="0">
+            <a:normAutofit/>
+          </a:bodyPr>
+          <a:lstStyle>
+            <a:lvl1pPr marL="0" indent="0" algn="r">
+              <a:buNone/>
+              <a:defRPr sz="1000">
+                <a:solidFill>
+                  <a:schemeClr val="tx2"/>
+                </a:solidFill>
+                <a:latin typeface="+mn-lt"/>
+                <a:ea typeface="+mn-ea"/>
+                <a:cs typeface="+mn-cs"/>
+              </a:defRPr>
+            </a:lvl1pPr>
+          </a:lstStyle>
+          <a:p>
+            <a:r>
+              <a:rPr lang="en-US"/>
+              <a:t>Date</a:t>
+            </a:r>
+            <a:endParaRPr lang="en-US"/>
+          </a:p>
+        </p:txBody>
+      </p:sp>
+      <p:sp>
+        <p:nvSpPr>
+          <p:cNvPr id="5" name="Footer Placeholder"/>
+          <p:cNvSpPr>
+            <a:spLocks noGrp="1"/>
+          </p:cNvSpPr>
+          <p:nvPr>
+            <p:ph type="ftr" sz="quarter" idx="3"/>
+          </p:nvPr>
+        </p:nvSpPr>
+        <p:spPr>
+          <a:xfrm>
+            <a:off x="609600" y="6515100"/>
+            <a:ext cx="6096000" cy="228600"/>
+          </a:xfrm>
+        </p:spPr>
+        <p:txBody>
+          <a:bodyPr anchor="ctr" lIns="0" tIns="0" rIns="0" bIns="0">
+            <a:normAutofit/>
+          </a:bodyPr>
+          <a:lstStyle>
+            <a:lvl1pPr marL="0" indent="0" algn="l">
+              <a:buNone/>
+              <a:defRPr sz="1000">
+                <a:solidFill>
+                  <a:schemeClr val="tx2"/>
+                </a:solidFill>
+                <a:latin typeface="+mn-lt"/>
+                <a:ea typeface="+mn-ea"/>
+                <a:cs typeface="+mn-cs"/>
+              </a:defRPr>
+            </a:lvl1pPr>
+          </a:lstStyle>
+          <a:p>
+            <a:r>
+              <a:rPr lang="en-US"/>
+              <a:t>Footer</a:t>
+            </a:r>
+            <a:endParaRPr lang="en-US"/>
+          </a:p>
+        </p:txBody>
+      </p:sp>
+      <p:sp>
+        <p:nvSpPr>
+          <p:cNvPr id="6" name="Slide Number Placeholder"/>
+          <p:cNvSpPr>
+            <a:spLocks noGrp="1"/>
+          </p:cNvSpPr>
+          <p:nvPr>
+            <p:ph type="sldNum" sz="quarter" idx="4"/>
+          </p:nvPr>
+        </p:nvSpPr>
+        <p:spPr>
+          <a:xfrm>
+            <a:off x="10477500" y="6515100"/>
+            <a:ext cx="1104900" cy="228600"/>
+          </a:xfrm>
+        </p:spPr>
+        <p:txBody>
+          <a:bodyPr anchor="ctr" lIns="0" tIns="0" rIns="0" bIns="0">
+            <a:normAutofit/>
+          </a:bodyPr>
+          <a:lstStyle>
+            <a:lvl1pPr marL="0" indent="0" algn="r">
+              <a:buNone/>
+              <a:defRPr sz="1000" b="1">
+                <a:solidFill>
+                  <a:schemeClr val="tx2"/>
+                </a:solidFill>
+                <a:latin typeface="+mn-lt"/>
+                <a:ea typeface="+mn-ea"/>
+                <a:cs typeface="+mn-cs"/>
+              </a:defRPr>
+            </a:lvl1pPr>
+          </a:lstStyle>
+          <a:p>
+            <a:fld id="{B6F15528-21DE-4FAA-801E-634DDDAF4B2B}" type="slidenum">
+              <a:rPr lang="en-US"/>
+              <a:t>‹#›</a:t>
+            </a:fld>
             <a:endParaRPr lang="en-US"/>
           </a:p>
         </p:txBody>
@@ -938,6 +3428,12 @@
     <p:sldLayoutId id="2147483651" r:id="rId3"/>
     <p:sldLayoutId id="2147483652" r:id="rId4"/>
     <p:sldLayoutId id="2147483653" r:id="rId5"/>
+    <p:sldLayoutId id="2147483654" r:id="rId6"/>
+    <p:sldLayoutId id="2147483655" r:id="rId7"/>
+    <p:sldLayoutId id="2147483656" r:id="rId8"/>
+    <p:sldLayoutId id="2147483657" r:id="rId9"/>
+    <p:sldLayoutId id="2147483658" r:id="rId10"/>
+    <p:sldLayoutId id="2147483659" r:id="rId11"/>
   </p:sldLayoutIdLst>
   <p:txStyles>
     <p:titleStyle>
